--- a/AI_for_Finance_Course/Slides/Class_08_Ensemble_Methods_Cloud_AI.pptx
+++ b/AI_for_Finance_Course/Slides/Class_08_Ensemble_Methods_Cloud_AI.pptx
@@ -500,6 +500,10 @@
           </p:nvPr>
         </p:nvSpPr>
         <p:spPr/>
+        <p:txBody>
+          <a:bodyPr/>
+          <a:p/>
+        </p:txBody>
       </p:sp>
       <p:sp>
         <p:nvSpPr>
@@ -588,6 +592,10 @@
           </p:nvPr>
         </p:nvSpPr>
         <p:spPr/>
+        <p:txBody>
+          <a:bodyPr/>
+          <a:p/>
+        </p:txBody>
       </p:sp>
       <p:sp>
         <p:nvSpPr>
@@ -676,6 +684,10 @@
           </p:nvPr>
         </p:nvSpPr>
         <p:spPr/>
+        <p:txBody>
+          <a:bodyPr/>
+          <a:p/>
+        </p:txBody>
       </p:sp>
       <p:sp>
         <p:nvSpPr>
@@ -764,6 +776,10 @@
           </p:nvPr>
         </p:nvSpPr>
         <p:spPr/>
+        <p:txBody>
+          <a:bodyPr/>
+          <a:p/>
+        </p:txBody>
       </p:sp>
       <p:sp>
         <p:nvSpPr>
@@ -852,6 +868,10 @@
           </p:nvPr>
         </p:nvSpPr>
         <p:spPr/>
+        <p:txBody>
+          <a:bodyPr/>
+          <a:p/>
+        </p:txBody>
       </p:sp>
       <p:sp>
         <p:nvSpPr>
@@ -940,6 +960,10 @@
           </p:nvPr>
         </p:nvSpPr>
         <p:spPr/>
+        <p:txBody>
+          <a:bodyPr/>
+          <a:p/>
+        </p:txBody>
       </p:sp>
       <p:sp>
         <p:nvSpPr>
@@ -1028,6 +1052,10 @@
           </p:nvPr>
         </p:nvSpPr>
         <p:spPr/>
+        <p:txBody>
+          <a:bodyPr/>
+          <a:p/>
+        </p:txBody>
       </p:sp>
       <p:sp>
         <p:nvSpPr>
@@ -1116,6 +1144,10 @@
           </p:nvPr>
         </p:nvSpPr>
         <p:spPr/>
+        <p:txBody>
+          <a:bodyPr/>
+          <a:p/>
+        </p:txBody>
       </p:sp>
       <p:sp>
         <p:nvSpPr>
@@ -1204,6 +1236,10 @@
           </p:nvPr>
         </p:nvSpPr>
         <p:spPr/>
+        <p:txBody>
+          <a:bodyPr/>
+          <a:p/>
+        </p:txBody>
       </p:sp>
       <p:sp>
         <p:nvSpPr>
@@ -1292,6 +1328,10 @@
           </p:nvPr>
         </p:nvSpPr>
         <p:spPr/>
+        <p:txBody>
+          <a:bodyPr/>
+          <a:p/>
+        </p:txBody>
       </p:sp>
       <p:sp>
         <p:nvSpPr>
@@ -1380,6 +1420,10 @@
           </p:nvPr>
         </p:nvSpPr>
         <p:spPr/>
+        <p:txBody>
+          <a:bodyPr/>
+          <a:p/>
+        </p:txBody>
       </p:sp>
       <p:sp>
         <p:nvSpPr>
@@ -1468,6 +1512,10 @@
           </p:nvPr>
         </p:nvSpPr>
         <p:spPr/>
+        <p:txBody>
+          <a:bodyPr/>
+          <a:p/>
+        </p:txBody>
       </p:sp>
       <p:sp>
         <p:nvSpPr>
@@ -1556,6 +1604,10 @@
           </p:nvPr>
         </p:nvSpPr>
         <p:spPr/>
+        <p:txBody>
+          <a:bodyPr/>
+          <a:p/>
+        </p:txBody>
       </p:sp>
       <p:sp>
         <p:nvSpPr>
@@ -1644,6 +1696,10 @@
           </p:nvPr>
         </p:nvSpPr>
         <p:spPr/>
+        <p:txBody>
+          <a:bodyPr/>
+          <a:p/>
+        </p:txBody>
       </p:sp>
       <p:sp>
         <p:nvSpPr>
@@ -1732,6 +1788,10 @@
           </p:nvPr>
         </p:nvSpPr>
         <p:spPr/>
+        <p:txBody>
+          <a:bodyPr/>
+          <a:p/>
+        </p:txBody>
       </p:sp>
       <p:sp>
         <p:nvSpPr>
@@ -1820,6 +1880,10 @@
           </p:nvPr>
         </p:nvSpPr>
         <p:spPr/>
+        <p:txBody>
+          <a:bodyPr/>
+          <a:p/>
+        </p:txBody>
       </p:sp>
       <p:sp>
         <p:nvSpPr>
@@ -1908,6 +1972,10 @@
           </p:nvPr>
         </p:nvSpPr>
         <p:spPr/>
+        <p:txBody>
+          <a:bodyPr/>
+          <a:p/>
+        </p:txBody>
       </p:sp>
       <p:sp>
         <p:nvSpPr>
@@ -2474,6 +2542,10 @@
           </a:solidFill>
           <a:ln/>
         </p:spPr>
+        <p:txBody>
+          <a:bodyPr/>
+          <a:p/>
+        </p:txBody>
       </p:sp>
     </p:spTree>
   </p:cSld>
@@ -2526,6 +2598,10 @@
           </a:solidFill>
           <a:ln/>
         </p:spPr>
+        <p:txBody>
+          <a:bodyPr/>
+          <a:p/>
+        </p:txBody>
       </p:sp>
       <p:sp>
         <p:nvSpPr>
@@ -2856,6 +2932,10 @@
           </a:solidFill>
           <a:ln/>
         </p:spPr>
+        <p:txBody>
+          <a:bodyPr/>
+          <a:p/>
+        </p:txBody>
       </p:sp>
       <p:sp>
         <p:nvSpPr>
@@ -3186,6 +3266,10 @@
           </a:solidFill>
           <a:ln/>
         </p:spPr>
+        <p:txBody>
+          <a:bodyPr/>
+          <a:p/>
+        </p:txBody>
       </p:sp>
       <p:sp>
         <p:nvSpPr>
@@ -3516,6 +3600,10 @@
           </a:solidFill>
           <a:ln/>
         </p:spPr>
+        <p:txBody>
+          <a:bodyPr/>
+          <a:p/>
+        </p:txBody>
       </p:sp>
       <p:sp>
         <p:nvSpPr>
@@ -3846,6 +3934,10 @@
           </a:solidFill>
           <a:ln/>
         </p:spPr>
+        <p:txBody>
+          <a:bodyPr/>
+          <a:p/>
+        </p:txBody>
       </p:sp>
       <p:sp>
         <p:nvSpPr>
@@ -4176,6 +4268,10 @@
           </a:solidFill>
           <a:ln/>
         </p:spPr>
+        <p:txBody>
+          <a:bodyPr/>
+          <a:p/>
+        </p:txBody>
       </p:sp>
       <p:sp>
         <p:nvSpPr>
@@ -4506,6 +4602,10 @@
           </a:solidFill>
           <a:ln/>
         </p:spPr>
+        <p:txBody>
+          <a:bodyPr/>
+          <a:p/>
+        </p:txBody>
       </p:sp>
       <p:sp>
         <p:nvSpPr>
@@ -4889,7 +4989,7 @@
                 <a:ea typeface="Calibri" pitchFamily="34" charset="-122"/>
                 <a:cs typeface="Calibri" pitchFamily="34" charset="-120"/>
               </a:rPr>
-              <a:t>Proxiant Academy — www.proxiant.com</a:t>
+              <a:t>Proxiant Academy | proxiant.ai</a:t>
             </a:r>
             <a:endParaRPr lang="en-US" sz="1400" dirty="0"/>
           </a:p>
@@ -4985,6 +5085,10 @@
           </a:solidFill>
           <a:ln/>
         </p:spPr>
+        <p:txBody>
+          <a:bodyPr/>
+          <a:p/>
+        </p:txBody>
       </p:sp>
       <p:sp>
         <p:nvSpPr>
@@ -5044,6 +5148,10 @@
           </a:solidFill>
           <a:ln/>
         </p:spPr>
+        <p:txBody>
+          <a:bodyPr/>
+          <a:p/>
+        </p:txBody>
       </p:sp>
       <p:sp>
         <p:nvSpPr>
@@ -5142,6 +5250,10 @@
           </a:solidFill>
           <a:ln/>
         </p:spPr>
+        <p:txBody>
+          <a:bodyPr/>
+          <a:p/>
+        </p:txBody>
       </p:sp>
       <p:sp>
         <p:nvSpPr>
@@ -5240,6 +5352,10 @@
           </a:solidFill>
           <a:ln/>
         </p:spPr>
+        <p:txBody>
+          <a:bodyPr/>
+          <a:p/>
+        </p:txBody>
       </p:sp>
       <p:sp>
         <p:nvSpPr>
@@ -5338,6 +5454,10 @@
           </a:solidFill>
           <a:ln/>
         </p:spPr>
+        <p:txBody>
+          <a:bodyPr/>
+          <a:p/>
+        </p:txBody>
       </p:sp>
       <p:sp>
         <p:nvSpPr>
@@ -5436,6 +5556,10 @@
           </a:solidFill>
           <a:ln/>
         </p:spPr>
+        <p:txBody>
+          <a:bodyPr/>
+          <a:p/>
+        </p:txBody>
       </p:sp>
       <p:sp>
         <p:nvSpPr>
@@ -5605,6 +5729,10 @@
           </a:solidFill>
           <a:ln/>
         </p:spPr>
+        <p:txBody>
+          <a:bodyPr/>
+          <a:p/>
+        </p:txBody>
       </p:sp>
       <p:sp>
         <p:nvSpPr>
@@ -5935,6 +6063,10 @@
           </a:solidFill>
           <a:ln/>
         </p:spPr>
+        <p:txBody>
+          <a:bodyPr/>
+          <a:p/>
+        </p:txBody>
       </p:sp>
       <p:sp>
         <p:nvSpPr>
@@ -6199,6 +6331,10 @@
             <a:prstDash val="solid"/>
           </a:ln>
         </p:spPr>
+        <p:txBody>
+          <a:bodyPr/>
+          <a:p/>
+        </p:txBody>
       </p:sp>
       <p:sp>
         <p:nvSpPr>
@@ -6403,6 +6539,10 @@
           </a:solidFill>
           <a:ln/>
         </p:spPr>
+        <p:txBody>
+          <a:bodyPr/>
+          <a:p/>
+        </p:txBody>
       </p:sp>
       <p:sp>
         <p:nvSpPr>
@@ -6733,6 +6873,10 @@
           </a:solidFill>
           <a:ln/>
         </p:spPr>
+        <p:txBody>
+          <a:bodyPr/>
+          <a:p/>
+        </p:txBody>
       </p:sp>
       <p:sp>
         <p:nvSpPr>
@@ -7063,6 +7207,10 @@
           </a:solidFill>
           <a:ln/>
         </p:spPr>
+        <p:txBody>
+          <a:bodyPr/>
+          <a:p/>
+        </p:txBody>
       </p:sp>
       <p:sp>
         <p:nvSpPr>
@@ -7393,6 +7541,10 @@
           </a:solidFill>
           <a:ln/>
         </p:spPr>
+        <p:txBody>
+          <a:bodyPr/>
+          <a:p/>
+        </p:txBody>
       </p:sp>
       <p:sp>
         <p:nvSpPr>
@@ -7723,6 +7875,10 @@
           </a:solidFill>
           <a:ln/>
         </p:spPr>
+        <p:txBody>
+          <a:bodyPr/>
+          <a:p/>
+        </p:txBody>
       </p:sp>
       <p:sp>
         <p:nvSpPr>
